--- a/dist/초1/수학/수와연산/초1_수학_수와연산_07_100까지의수.pptx
+++ b/dist/초1/수학/수와연산/초1_수학_수와연산_07_100까지의수.pptx
@@ -121,13 +121,13 @@
   <p:extLst>
     <p:ext uri="{521415D9-36F7-43E2-AB2F-B90AF26B5E84}">
       <p14:sectionLst xmlns:p14="http://schemas.microsoft.com/office/powerpoint/2010/main">
-        <p14:section name="도입" id="{50cc30a5-78c7-3bb6-8d46-5649387e2bfa}">
+        <p14:section name="도입" id="{3d3ab864-a7ab-5bb4-c4e5-bd21a18e0aa9}">
           <p14:sldIdLst>
             <p14:sldId id="256"/>
             <p14:sldId id="257"/>
           </p14:sldIdLst>
         </p14:section>
-        <p14:section name="개념" id="{94e91ac6-e5fa-bcb3-f1de-3f2eab2085a7}">
+        <p14:section name="개념" id="{1efc6dfb-75f6-29e3-a36f-0511e540bc74}">
           <p14:sldIdLst>
             <p14:sldId id="258"/>
             <p14:sldId id="259"/>
@@ -136,26 +136,26 @@
             <p14:sldId id="262"/>
           </p14:sldIdLst>
         </p14:section>
-        <p14:section name="연습" id="{d9d98341-257e-21ee-7cdf-eb63326d9e05}">
+        <p14:section name="연습" id="{dbec8505-b449-832d-9a1b-3ebef109ef6e}">
           <p14:sldIdLst>
             <p14:sldId id="263"/>
             <p14:sldId id="264"/>
             <p14:sldId id="265"/>
           </p14:sldIdLst>
         </p14:section>
-        <p14:section name="확인" id="{a97e4189-0e83-6d03-eb3b-ebc1225c57b5}">
+        <p14:section name="확인" id="{ce20caa1-33dc-526d-54cc-a497b2247782}">
           <p14:sldIdLst>
             <p14:sldId id="266"/>
             <p14:sldId id="267"/>
             <p14:sldId id="268"/>
           </p14:sldIdLst>
         </p14:section>
-        <p14:section name="정리" id="{286ec42b-6e42-3d23-4b70-5989f0f17d6d}">
+        <p14:section name="정리" id="{187e17e8-a5c7-c146-1b17-8c7bbf725493}">
           <p14:sldIdLst>
             <p14:sldId id="269"/>
           </p14:sldIdLst>
         </p14:section>
-        <p14:section name="보충" id="{8fc25da3-54dc-e031-1b7e-9cd79fc5a3ac}">
+        <p14:section name="보충" id="{6f1b2c63-9f31-8f35-c98a-f836ae6819d7}">
           <p14:sldIdLst>
             <p14:sldId id="270"/>
           </p14:sldIdLst>
@@ -3057,7 +3057,7 @@
           <a:bodyPr wrap="square" lIns="0" tIns="0" rIns="0" bIns="0" rtlCol="0" anchor="ctr"/>
           <a:lstStyle/>
           <a:p>
-            <a:pPr algn="l" indent="0" marL="0">
+            <a:pPr eaLnBrk="0" algn="l" indent="0" marL="0">
               <a:buNone/>
             </a:pPr>
             <a:r>
@@ -3098,7 +3098,7 @@
           <a:bodyPr wrap="square" lIns="0" tIns="0" rIns="0" bIns="0" rtlCol="0" anchor="t"/>
           <a:lstStyle/>
           <a:p>
-            <a:pPr indent="0" marL="0">
+            <a:pPr eaLnBrk="0" indent="0" marL="0">
               <a:buNone/>
             </a:pPr>
             <a:r>
@@ -4635,7 +4635,7 @@
           <a:bodyPr wrap="square" lIns="0" tIns="0" rIns="0" bIns="0" rtlCol="0" anchor="ctr"/>
           <a:lstStyle/>
           <a:p>
-            <a:pPr indent="0" marL="0">
+            <a:pPr eaLnBrk="0" indent="0" marL="0">
               <a:spcAft>
                 <a:spcPts val="600"/>
               </a:spcAft>
@@ -4655,7 +4655,7 @@
             <a:endParaRPr lang="ko-KR" sz="3200" dirty="0"/>
           </a:p>
           <a:p>
-            <a:pPr indent="0" marL="0">
+            <a:pPr eaLnBrk="0" indent="0" marL="0">
               <a:spcAft>
                 <a:spcPts val="600"/>
               </a:spcAft>
@@ -4675,7 +4675,7 @@
             <a:endParaRPr lang="ko-KR" sz="3200" dirty="0"/>
           </a:p>
           <a:p>
-            <a:pPr indent="0" marL="0">
+            <a:pPr eaLnBrk="0" indent="0" marL="0">
               <a:spcAft>
                 <a:spcPts val="600"/>
               </a:spcAft>
@@ -4744,7 +4744,7 @@
           <a:bodyPr wrap="square" lIns="0" tIns="0" rIns="0" bIns="0" rtlCol="0" anchor="ctr"/>
           <a:lstStyle/>
           <a:p>
-            <a:pPr algn="l" indent="0" marL="0">
+            <a:pPr eaLnBrk="0" algn="l" indent="0" marL="0">
               <a:buNone/>
             </a:pPr>
             <a:r>
@@ -4810,7 +4810,7 @@
           <a:bodyPr wrap="square" lIns="0" tIns="0" rIns="0" bIns="0" rtlCol="0" anchor="ctr"/>
           <a:lstStyle/>
           <a:p>
-            <a:pPr indent="0" marL="0">
+            <a:pPr eaLnBrk="0" indent="0" marL="0">
               <a:spcAft>
                 <a:spcPts val="600"/>
               </a:spcAft>
@@ -4879,7 +4879,7 @@
           <a:bodyPr wrap="square" lIns="0" tIns="0" rIns="0" bIns="0" rtlCol="0" anchor="ctr"/>
           <a:lstStyle/>
           <a:p>
-            <a:pPr indent="0" marL="0">
+            <a:pPr eaLnBrk="0" indent="0" marL="0">
               <a:spcAft>
                 <a:spcPts val="600"/>
               </a:spcAft>
@@ -4929,7 +4929,7 @@
           <a:bodyPr wrap="square" lIns="177800" tIns="0" rIns="177800" bIns="0" rtlCol="0" anchor="ctr"/>
           <a:lstStyle/>
           <a:p>
-            <a:pPr algn="l" indent="0" marL="0">
+            <a:pPr eaLnBrk="0" algn="l" indent="0" marL="0">
               <a:buNone/>
             </a:pPr>
             <a:r>
@@ -4968,7 +4968,7 @@
           <a:bodyPr wrap="square" lIns="0" tIns="0" rIns="0" bIns="0" rtlCol="0" anchor="t"/>
           <a:lstStyle/>
           <a:p>
-            <a:pPr algn="l" indent="0" marL="0">
+            <a:pPr eaLnBrk="0" algn="l" indent="0" marL="0">
               <a:buNone/>
             </a:pPr>
             <a:r>
@@ -4985,7 +4985,7 @@
             <a:endParaRPr lang="ko-KR" sz="3200" dirty="0"/>
           </a:p>
           <a:p>
-            <a:pPr algn="l" indent="0" marL="0">
+            <a:pPr eaLnBrk="0" algn="l" indent="0" marL="0">
               <a:buNone/>
             </a:pPr>
             <a:r>
@@ -5032,7 +5032,7 @@
           <a:bodyPr wrap="square" lIns="177800" tIns="0" rIns="177800" bIns="0" rtlCol="0" anchor="ctr"/>
           <a:lstStyle/>
           <a:p>
-            <a:pPr algn="l" indent="0" marL="0">
+            <a:pPr eaLnBrk="0" algn="l" indent="0" marL="0">
               <a:buNone/>
             </a:pPr>
             <a:r>
@@ -5071,7 +5071,7 @@
           <a:bodyPr wrap="square" lIns="0" tIns="0" rIns="0" bIns="0" rtlCol="0" anchor="t"/>
           <a:lstStyle/>
           <a:p>
-            <a:pPr algn="l" indent="0" marL="0">
+            <a:pPr eaLnBrk="0" algn="l" indent="0" marL="0">
               <a:buNone/>
             </a:pPr>
             <a:r>
@@ -5088,7 +5088,7 @@
             <a:endParaRPr lang="ko-KR" sz="3200" dirty="0"/>
           </a:p>
           <a:p>
-            <a:pPr algn="l" indent="0" marL="0">
+            <a:pPr eaLnBrk="0" algn="l" indent="0" marL="0">
               <a:buNone/>
             </a:pPr>
             <a:r>
@@ -5145,7 +5145,7 @@
             </a:lvl1pPr>
           </a:lstStyle>
           <a:p>
-            <a:pPr algn="r"/>
+            <a:pPr eaLnBrk="0" algn="r"/>
             <a:fld id="{F7021451-1387-4CA6-816F-3879F97B5CBC}" type="slidenum">
               <a:rPr b="0" lang="en-US"/>
               <a:t>10</a:t>
@@ -5202,7 +5202,7 @@
           <a:bodyPr wrap="square" lIns="0" tIns="0" rIns="0" bIns="0" rtlCol="0" anchor="ctr"/>
           <a:lstStyle/>
           <a:p>
-            <a:pPr algn="l" indent="0" marL="0">
+            <a:pPr eaLnBrk="0" algn="l" indent="0" marL="0">
               <a:buNone/>
             </a:pPr>
             <a:r>
@@ -5241,7 +5241,7 @@
           <a:bodyPr wrap="square" lIns="0" tIns="0" rIns="0" bIns="0" rtlCol="0" anchor="ctr"/>
           <a:lstStyle/>
           <a:p>
-            <a:pPr algn="l" indent="0" marL="0">
+            <a:pPr eaLnBrk="0" algn="l" indent="0" marL="0">
               <a:buNone/>
             </a:pPr>
             <a:r>
@@ -5288,7 +5288,7 @@
           <a:bodyPr wrap="square" lIns="0" tIns="0" rIns="0" bIns="0" rtlCol="0" anchor="ctr"/>
           <a:lstStyle/>
           <a:p>
-            <a:pPr algn="ctr" indent="0" marL="0">
+            <a:pPr eaLnBrk="0" algn="ctr" indent="0" marL="0">
               <a:buNone/>
             </a:pPr>
             <a:r>
@@ -5327,7 +5327,7 @@
           <a:bodyPr wrap="square" lIns="0" tIns="0" rIns="0" bIns="0" rtlCol="0" anchor="ctr"/>
           <a:lstStyle/>
           <a:p>
-            <a:pPr algn="l" indent="0" marL="0">
+            <a:pPr eaLnBrk="0" algn="l" indent="0" marL="0">
               <a:buNone/>
             </a:pPr>
             <a:r>
@@ -5374,7 +5374,7 @@
           <a:bodyPr wrap="square" lIns="0" tIns="0" rIns="0" bIns="0" rtlCol="0" anchor="ctr"/>
           <a:lstStyle/>
           <a:p>
-            <a:pPr algn="ctr" indent="0" marL="0">
+            <a:pPr eaLnBrk="0" algn="ctr" indent="0" marL="0">
               <a:buNone/>
             </a:pPr>
             <a:r>
@@ -5413,7 +5413,7 @@
           <a:bodyPr wrap="square" lIns="0" tIns="0" rIns="0" bIns="0" rtlCol="0" anchor="ctr"/>
           <a:lstStyle/>
           <a:p>
-            <a:pPr algn="l" indent="0" marL="0">
+            <a:pPr eaLnBrk="0" algn="l" indent="0" marL="0">
               <a:buNone/>
             </a:pPr>
             <a:r>
@@ -5460,7 +5460,7 @@
           <a:bodyPr wrap="square" lIns="0" tIns="0" rIns="0" bIns="0" rtlCol="0" anchor="ctr"/>
           <a:lstStyle/>
           <a:p>
-            <a:pPr algn="ctr" indent="0" marL="0">
+            <a:pPr eaLnBrk="0" algn="ctr" indent="0" marL="0">
               <a:buNone/>
             </a:pPr>
             <a:r>
@@ -5499,7 +5499,7 @@
           <a:bodyPr wrap="square" lIns="0" tIns="0" rIns="0" bIns="0" rtlCol="0" anchor="ctr"/>
           <a:lstStyle/>
           <a:p>
-            <a:pPr algn="l" indent="0" marL="0">
+            <a:pPr eaLnBrk="0" algn="l" indent="0" marL="0">
               <a:buNone/>
             </a:pPr>
             <a:r>
@@ -5546,7 +5546,7 @@
           <a:bodyPr wrap="square" lIns="0" tIns="0" rIns="0" bIns="0" rtlCol="0" anchor="ctr"/>
           <a:lstStyle/>
           <a:p>
-            <a:pPr algn="ctr" indent="0" marL="0">
+            <a:pPr eaLnBrk="0" algn="ctr" indent="0" marL="0">
               <a:buNone/>
             </a:pPr>
             <a:r>
@@ -5585,7 +5585,7 @@
           <a:bodyPr wrap="square" lIns="0" tIns="0" rIns="0" bIns="0" rtlCol="0" anchor="ctr"/>
           <a:lstStyle/>
           <a:p>
-            <a:pPr algn="l" indent="0" marL="0">
+            <a:pPr eaLnBrk="0" algn="l" indent="0" marL="0">
               <a:buNone/>
             </a:pPr>
             <a:r>
@@ -5642,7 +5642,7 @@
             </a:lvl1pPr>
           </a:lstStyle>
           <a:p>
-            <a:pPr algn="r"/>
+            <a:pPr eaLnBrk="0" algn="r"/>
             <a:fld id="{F7021451-1387-4CA6-816F-3879F97B5CBC}" type="slidenum">
               <a:rPr b="0" lang="en-US"/>
               <a:t>11</a:t>
@@ -5699,7 +5699,7 @@
           <a:bodyPr wrap="square" lIns="0" tIns="0" rIns="0" bIns="0" rtlCol="0" anchor="ctr"/>
           <a:lstStyle/>
           <a:p>
-            <a:pPr algn="l" indent="0" marL="0">
+            <a:pPr eaLnBrk="0" algn="l" indent="0" marL="0">
               <a:buNone/>
             </a:pPr>
             <a:r>
@@ -5765,7 +5765,7 @@
           <a:bodyPr wrap="square" lIns="0" tIns="0" rIns="0" bIns="0" rtlCol="0" anchor="ctr"/>
           <a:lstStyle/>
           <a:p>
-            <a:pPr indent="0" marL="0">
+            <a:pPr eaLnBrk="0" indent="0" marL="0">
               <a:spcAft>
                 <a:spcPts val="600"/>
               </a:spcAft>
@@ -5815,7 +5815,7 @@
           <a:bodyPr wrap="square" lIns="177800" tIns="0" rIns="177800" bIns="0" rtlCol="0" anchor="ctr"/>
           <a:lstStyle/>
           <a:p>
-            <a:pPr algn="l" indent="0" marL="0">
+            <a:pPr eaLnBrk="0" algn="l" indent="0" marL="0">
               <a:buNone/>
             </a:pPr>
             <a:r>
@@ -5854,7 +5854,7 @@
           <a:bodyPr wrap="square" lIns="0" tIns="0" rIns="0" bIns="0" rtlCol="0" anchor="ctr"/>
           <a:lstStyle/>
           <a:p>
-            <a:pPr algn="l" indent="0" marL="0">
+            <a:pPr eaLnBrk="0" algn="l" indent="0" marL="0">
               <a:buNone/>
             </a:pPr>
             <a:r>
@@ -5893,7 +5893,7 @@
           <a:bodyPr wrap="square" lIns="0" tIns="0" rIns="0" bIns="0" rtlCol="0" anchor="ctr"/>
           <a:lstStyle/>
           <a:p>
-            <a:pPr algn="l" indent="0" marL="0">
+            <a:pPr eaLnBrk="0" algn="l" indent="0" marL="0">
               <a:buNone/>
             </a:pPr>
             <a:r>
@@ -5932,7 +5932,7 @@
           <a:bodyPr wrap="square" lIns="0" tIns="0" rIns="0" bIns="0" rtlCol="0" anchor="ctr"/>
           <a:lstStyle/>
           <a:p>
-            <a:pPr algn="l" indent="0" marL="0">
+            <a:pPr eaLnBrk="0" algn="l" indent="0" marL="0">
               <a:buNone/>
             </a:pPr>
             <a:r>
@@ -5971,7 +5971,7 @@
           <a:bodyPr wrap="square" lIns="0" tIns="0" rIns="0" bIns="0" rtlCol="0" anchor="ctr"/>
           <a:lstStyle/>
           <a:p>
-            <a:pPr algn="l" indent="0" marL="0">
+            <a:pPr eaLnBrk="0" algn="l" indent="0" marL="0">
               <a:buNone/>
             </a:pPr>
             <a:r>
@@ -6010,7 +6010,7 @@
           <a:bodyPr wrap="square" lIns="0" tIns="0" rIns="0" bIns="0" rtlCol="0" anchor="ctr"/>
           <a:lstStyle/>
           <a:p>
-            <a:pPr algn="l" indent="0" marL="0">
+            <a:pPr eaLnBrk="0" algn="l" indent="0" marL="0">
               <a:buNone/>
             </a:pPr>
             <a:r>
@@ -6049,7 +6049,7 @@
           <a:bodyPr wrap="square" lIns="0" tIns="0" rIns="0" bIns="0" rtlCol="0" anchor="ctr"/>
           <a:lstStyle/>
           <a:p>
-            <a:pPr algn="l" indent="0" marL="0">
+            <a:pPr eaLnBrk="0" algn="l" indent="0" marL="0">
               <a:buNone/>
             </a:pPr>
             <a:r>
@@ -6088,7 +6088,7 @@
           <a:bodyPr wrap="square" lIns="0" tIns="0" rIns="0" bIns="0" rtlCol="0" anchor="ctr"/>
           <a:lstStyle/>
           <a:p>
-            <a:pPr algn="l" indent="0" marL="0">
+            <a:pPr eaLnBrk="0" algn="l" indent="0" marL="0">
               <a:buNone/>
             </a:pPr>
             <a:r>
@@ -6127,7 +6127,7 @@
           <a:bodyPr wrap="square" lIns="0" tIns="0" rIns="0" bIns="0" rtlCol="0" anchor="ctr"/>
           <a:lstStyle/>
           <a:p>
-            <a:pPr algn="l" indent="0" marL="0">
+            <a:pPr eaLnBrk="0" algn="l" indent="0" marL="0">
               <a:buNone/>
             </a:pPr>
             <a:r>
@@ -6174,7 +6174,7 @@
           <a:bodyPr wrap="square" lIns="177800" tIns="0" rIns="177800" bIns="0" rtlCol="0" anchor="ctr"/>
           <a:lstStyle/>
           <a:p>
-            <a:pPr algn="l" indent="0" marL="0">
+            <a:pPr eaLnBrk="0" algn="l" indent="0" marL="0">
               <a:buNone/>
             </a:pPr>
             <a:r>
@@ -6213,7 +6213,7 @@
           <a:bodyPr wrap="square" lIns="0" tIns="0" rIns="0" bIns="0" rtlCol="0" anchor="ctr"/>
           <a:lstStyle/>
           <a:p>
-            <a:pPr algn="l" indent="0" marL="0">
+            <a:pPr eaLnBrk="0" algn="l" indent="0" marL="0">
               <a:buNone/>
             </a:pPr>
             <a:r>
@@ -6252,7 +6252,7 @@
           <a:bodyPr wrap="square" lIns="0" tIns="0" rIns="0" bIns="0" rtlCol="0" anchor="ctr"/>
           <a:lstStyle/>
           <a:p>
-            <a:pPr algn="l" indent="0" marL="0">
+            <a:pPr eaLnBrk="0" algn="l" indent="0" marL="0">
               <a:buNone/>
             </a:pPr>
             <a:r>
@@ -6291,7 +6291,7 @@
           <a:bodyPr wrap="square" lIns="0" tIns="0" rIns="0" bIns="0" rtlCol="0" anchor="ctr"/>
           <a:lstStyle/>
           <a:p>
-            <a:pPr algn="l" indent="0" marL="0">
+            <a:pPr eaLnBrk="0" algn="l" indent="0" marL="0">
               <a:buNone/>
             </a:pPr>
             <a:r>
@@ -6330,7 +6330,7 @@
           <a:bodyPr wrap="square" lIns="0" tIns="0" rIns="0" bIns="0" rtlCol="0" anchor="ctr"/>
           <a:lstStyle/>
           <a:p>
-            <a:pPr algn="l" indent="0" marL="0">
+            <a:pPr eaLnBrk="0" algn="l" indent="0" marL="0">
               <a:buNone/>
             </a:pPr>
             <a:r>
@@ -6387,7 +6387,7 @@
             </a:lvl1pPr>
           </a:lstStyle>
           <a:p>
-            <a:pPr algn="r"/>
+            <a:pPr eaLnBrk="0" algn="r"/>
             <a:fld id="{F7021451-1387-4CA6-816F-3879F97B5CBC}" type="slidenum">
               <a:rPr b="0" lang="en-US"/>
               <a:t>12</a:t>
@@ -6444,7 +6444,7 @@
           <a:bodyPr wrap="square" lIns="0" tIns="0" rIns="0" bIns="0" rtlCol="0" anchor="ctr"/>
           <a:lstStyle/>
           <a:p>
-            <a:pPr algn="l" indent="0" marL="0">
+            <a:pPr eaLnBrk="0" algn="l" indent="0" marL="0">
               <a:buNone/>
             </a:pPr>
             <a:r>
@@ -6510,7 +6510,7 @@
           <a:bodyPr wrap="square" lIns="0" tIns="0" rIns="0" bIns="0" rtlCol="0" anchor="ctr"/>
           <a:lstStyle/>
           <a:p>
-            <a:pPr indent="0" marL="0">
+            <a:pPr eaLnBrk="0" indent="0" marL="0">
               <a:spcAft>
                 <a:spcPts val="600"/>
               </a:spcAft>
@@ -6560,7 +6560,7 @@
           <a:bodyPr wrap="square" lIns="0" tIns="0" rIns="0" bIns="0" rtlCol="0" anchor="ctr"/>
           <a:lstStyle/>
           <a:p>
-            <a:pPr algn="ctr" indent="0" marL="0">
+            <a:pPr eaLnBrk="0" algn="ctr" indent="0" marL="0">
               <a:buNone/>
             </a:pPr>
             <a:r>
@@ -7557,7 +7557,7 @@
           <a:bodyPr wrap="square" lIns="0" tIns="0" rIns="0" bIns="0" rtlCol="0" anchor="ctr"/>
           <a:lstStyle/>
           <a:p>
-            <a:pPr algn="ctr" indent="0" marL="0">
+            <a:pPr eaLnBrk="0" algn="ctr" indent="0" marL="0">
               <a:buNone/>
             </a:pPr>
             <a:r>
@@ -8596,7 +8596,7 @@
             </a:lvl1pPr>
           </a:lstStyle>
           <a:p>
-            <a:pPr algn="r"/>
+            <a:pPr eaLnBrk="0" algn="r"/>
             <a:fld id="{F7021451-1387-4CA6-816F-3879F97B5CBC}" type="slidenum">
               <a:rPr b="0" lang="en-US"/>
               <a:t>13</a:t>
@@ -8653,7 +8653,7 @@
           <a:bodyPr wrap="square" lIns="0" tIns="0" rIns="0" bIns="0" rtlCol="0" anchor="ctr"/>
           <a:lstStyle/>
           <a:p>
-            <a:pPr algn="l" indent="0" marL="0">
+            <a:pPr eaLnBrk="0" algn="l" indent="0" marL="0">
               <a:buNone/>
             </a:pPr>
             <a:r>
@@ -8719,7 +8719,7 @@
           <a:bodyPr wrap="square" lIns="0" tIns="0" rIns="0" bIns="0" rtlCol="0" anchor="ctr"/>
           <a:lstStyle/>
           <a:p>
-            <a:pPr indent="0" marL="0">
+            <a:pPr eaLnBrk="0" indent="0" marL="0">
               <a:spcAft>
                 <a:spcPts val="600"/>
               </a:spcAft>
@@ -8769,7 +8769,7 @@
           <a:bodyPr wrap="square" lIns="177800" tIns="0" rIns="177800" bIns="0" rtlCol="0" anchor="ctr"/>
           <a:lstStyle/>
           <a:p>
-            <a:pPr algn="l" indent="0" marL="0">
+            <a:pPr eaLnBrk="0" algn="l" indent="0" marL="0">
               <a:buNone/>
             </a:pPr>
             <a:r>
@@ -8816,7 +8816,7 @@
           <a:bodyPr wrap="square" lIns="177800" tIns="0" rIns="177800" bIns="0" rtlCol="0" anchor="ctr"/>
           <a:lstStyle/>
           <a:p>
-            <a:pPr algn="l" indent="0" marL="0">
+            <a:pPr eaLnBrk="0" algn="l" indent="0" marL="0">
               <a:buNone/>
             </a:pPr>
             <a:r>
@@ -8855,7 +8855,7 @@
           <a:bodyPr wrap="square" lIns="0" tIns="0" rIns="0" bIns="0" rtlCol="0" anchor="t"/>
           <a:lstStyle/>
           <a:p>
-            <a:pPr algn="l" indent="0" marL="0">
+            <a:pPr eaLnBrk="0" algn="l" indent="0" marL="0">
               <a:buNone/>
             </a:pPr>
             <a:r>
@@ -8894,7 +8894,7 @@
           <a:bodyPr wrap="square" lIns="0" tIns="0" rIns="0" bIns="0" rtlCol="0" anchor="ctr"/>
           <a:lstStyle/>
           <a:p>
-            <a:pPr algn="l" indent="0" marL="0">
+            <a:pPr eaLnBrk="0" algn="l" indent="0" marL="0">
               <a:buNone/>
             </a:pPr>
             <a:r>
@@ -8911,7 +8911,7 @@
             <a:endParaRPr lang="ko-KR" sz="2600" dirty="0"/>
           </a:p>
           <a:p>
-            <a:pPr algn="l" indent="0" marL="0">
+            <a:pPr eaLnBrk="0" algn="l" indent="0" marL="0">
               <a:buNone/>
             </a:pPr>
             <a:r>
@@ -8950,7 +8950,7 @@
           <a:bodyPr wrap="square" lIns="0" tIns="0" rIns="0" bIns="0" rtlCol="0" anchor="ctr"/>
           <a:lstStyle/>
           <a:p>
-            <a:pPr algn="l" indent="0" marL="0">
+            <a:pPr eaLnBrk="0" algn="l" indent="0" marL="0">
               <a:buNone/>
             </a:pPr>
             <a:r>
@@ -8967,7 +8967,7 @@
             <a:endParaRPr lang="ko-KR" sz="2600" dirty="0"/>
           </a:p>
           <a:p>
-            <a:pPr algn="l" indent="0" marL="0">
+            <a:pPr eaLnBrk="0" algn="l" indent="0" marL="0">
               <a:buNone/>
             </a:pPr>
             <a:r>
@@ -9006,7 +9006,7 @@
           <a:bodyPr wrap="square" lIns="0" tIns="0" rIns="0" bIns="0" rtlCol="0" anchor="ctr"/>
           <a:lstStyle/>
           <a:p>
-            <a:pPr algn="l" indent="0" marL="0">
+            <a:pPr eaLnBrk="0" algn="l" indent="0" marL="0">
               <a:buNone/>
             </a:pPr>
             <a:r>
@@ -9023,7 +9023,7 @@
             <a:endParaRPr lang="ko-KR" sz="2600" dirty="0"/>
           </a:p>
           <a:p>
-            <a:pPr algn="l" indent="0" marL="0">
+            <a:pPr eaLnBrk="0" algn="l" indent="0" marL="0">
               <a:buNone/>
             </a:pPr>
             <a:r>
@@ -9062,7 +9062,7 @@
           <a:bodyPr wrap="square" lIns="0" tIns="0" rIns="0" bIns="0" rtlCol="0" anchor="ctr"/>
           <a:lstStyle/>
           <a:p>
-            <a:pPr algn="l" indent="0" marL="0">
+            <a:pPr eaLnBrk="0" algn="l" indent="0" marL="0">
               <a:buNone/>
             </a:pPr>
             <a:r>
@@ -9119,7 +9119,7 @@
             </a:lvl1pPr>
           </a:lstStyle>
           <a:p>
-            <a:pPr algn="r"/>
+            <a:pPr eaLnBrk="0" algn="r"/>
             <a:fld id="{F7021451-1387-4CA6-816F-3879F97B5CBC}" type="slidenum">
               <a:rPr b="0" lang="en-US"/>
               <a:t>14</a:t>
@@ -9176,7 +9176,7 @@
           <a:bodyPr wrap="square" lIns="0" tIns="0" rIns="0" bIns="0" rtlCol="0" anchor="ctr"/>
           <a:lstStyle/>
           <a:p>
-            <a:pPr algn="l" indent="0" marL="0">
+            <a:pPr eaLnBrk="0" algn="l" indent="0" marL="0">
               <a:buNone/>
             </a:pPr>
             <a:r>
@@ -9215,7 +9215,7 @@
           <a:bodyPr wrap="square" lIns="0" tIns="0" rIns="0" bIns="0" rtlCol="0" anchor="ctr"/>
           <a:lstStyle/>
           <a:p>
-            <a:pPr algn="l" indent="0" marL="0">
+            <a:pPr eaLnBrk="0" algn="l" indent="0" marL="0">
               <a:buNone/>
             </a:pPr>
             <a:r>
@@ -9281,7 +9281,7 @@
           <a:bodyPr wrap="square" lIns="0" tIns="0" rIns="0" bIns="0" rtlCol="0" anchor="ctr"/>
           <a:lstStyle/>
           <a:p>
-            <a:pPr indent="0" marL="0">
+            <a:pPr eaLnBrk="0" indent="0" marL="0">
               <a:spcAft>
                 <a:spcPts val="600"/>
               </a:spcAft>
@@ -9910,7 +9910,7 @@
           <a:bodyPr wrap="square" lIns="0" tIns="0" rIns="0" bIns="0" rtlCol="0" anchor="ctr"/>
           <a:lstStyle/>
           <a:p>
-            <a:pPr algn="ctr" indent="0" marL="0">
+            <a:pPr eaLnBrk="0" algn="ctr" indent="0" marL="0">
               <a:buNone/>
             </a:pPr>
             <a:r>
@@ -10103,7 +10103,7 @@
           <a:bodyPr wrap="square" lIns="0" tIns="0" rIns="0" bIns="0" rtlCol="0" anchor="ctr"/>
           <a:lstStyle/>
           <a:p>
-            <a:pPr algn="ctr" indent="0" marL="0">
+            <a:pPr eaLnBrk="0" algn="ctr" indent="0" marL="0">
               <a:buNone/>
             </a:pPr>
             <a:r>
@@ -10160,7 +10160,7 @@
             </a:lvl1pPr>
           </a:lstStyle>
           <a:p>
-            <a:pPr algn="r"/>
+            <a:pPr eaLnBrk="0" algn="r"/>
             <a:fld id="{F7021451-1387-4CA6-816F-3879F97B5CBC}" type="slidenum">
               <a:rPr b="0" lang="en-US"/>
               <a:t>15</a:t>
@@ -10217,7 +10217,7 @@
           <a:bodyPr wrap="square" lIns="0" tIns="0" rIns="0" bIns="0" rtlCol="0" anchor="ctr"/>
           <a:lstStyle/>
           <a:p>
-            <a:pPr algn="l" indent="0" marL="0">
+            <a:pPr eaLnBrk="0" algn="l" indent="0" marL="0">
               <a:buNone/>
             </a:pPr>
             <a:r>
@@ -10264,7 +10264,7 @@
           <a:bodyPr wrap="square" lIns="0" tIns="0" rIns="0" bIns="0" rtlCol="0" anchor="ctr"/>
           <a:lstStyle/>
           <a:p>
-            <a:pPr algn="ctr" indent="0" marL="0">
+            <a:pPr eaLnBrk="0" algn="ctr" indent="0" marL="0">
               <a:buNone/>
             </a:pPr>
             <a:r>
@@ -10303,7 +10303,7 @@
           <a:bodyPr wrap="square" lIns="0" tIns="0" rIns="0" bIns="0" rtlCol="0" anchor="ctr"/>
           <a:lstStyle/>
           <a:p>
-            <a:pPr algn="l" indent="0" marL="0">
+            <a:pPr eaLnBrk="0" algn="l" indent="0" marL="0">
               <a:buNone/>
             </a:pPr>
             <a:r>
@@ -10350,7 +10350,7 @@
           <a:bodyPr wrap="square" lIns="0" tIns="0" rIns="0" bIns="0" rtlCol="0" anchor="ctr"/>
           <a:lstStyle/>
           <a:p>
-            <a:pPr algn="ctr" indent="0" marL="0">
+            <a:pPr eaLnBrk="0" algn="ctr" indent="0" marL="0">
               <a:buNone/>
             </a:pPr>
             <a:r>
@@ -10389,7 +10389,7 @@
           <a:bodyPr wrap="square" lIns="0" tIns="0" rIns="0" bIns="0" rtlCol="0" anchor="ctr"/>
           <a:lstStyle/>
           <a:p>
-            <a:pPr algn="l" indent="0" marL="0">
+            <a:pPr eaLnBrk="0" algn="l" indent="0" marL="0">
               <a:buNone/>
             </a:pPr>
             <a:r>
@@ -10436,7 +10436,7 @@
           <a:bodyPr wrap="square" lIns="0" tIns="0" rIns="0" bIns="0" rtlCol="0" anchor="ctr"/>
           <a:lstStyle/>
           <a:p>
-            <a:pPr algn="ctr" indent="0" marL="0">
+            <a:pPr eaLnBrk="0" algn="ctr" indent="0" marL="0">
               <a:buNone/>
             </a:pPr>
             <a:r>
@@ -10475,7 +10475,7 @@
           <a:bodyPr wrap="square" lIns="0" tIns="0" rIns="0" bIns="0" rtlCol="0" anchor="ctr"/>
           <a:lstStyle/>
           <a:p>
-            <a:pPr algn="l" indent="0" marL="0">
+            <a:pPr eaLnBrk="0" algn="l" indent="0" marL="0">
               <a:buNone/>
             </a:pPr>
             <a:r>
@@ -10532,7 +10532,7 @@
             </a:lvl1pPr>
           </a:lstStyle>
           <a:p>
-            <a:pPr algn="r"/>
+            <a:pPr eaLnBrk="0" algn="r"/>
             <a:fld id="{F7021451-1387-4CA6-816F-3879F97B5CBC}" type="slidenum">
               <a:rPr b="0" lang="en-US"/>
               <a:t>2</a:t>
@@ -10589,7 +10589,7 @@
           <a:bodyPr wrap="square" lIns="0" tIns="0" rIns="0" bIns="0" rtlCol="0" anchor="ctr"/>
           <a:lstStyle/>
           <a:p>
-            <a:pPr algn="l" indent="0" marL="0">
+            <a:pPr eaLnBrk="0" algn="l" indent="0" marL="0">
               <a:buNone/>
             </a:pPr>
             <a:r>
@@ -10628,7 +10628,7 @@
           <a:bodyPr wrap="square" lIns="0" tIns="0" rIns="0" bIns="0" rtlCol="0" anchor="ctr"/>
           <a:lstStyle/>
           <a:p>
-            <a:pPr algn="l" indent="0" marL="0">
+            <a:pPr eaLnBrk="0" algn="l" indent="0" marL="0">
               <a:buNone/>
             </a:pPr>
             <a:r>
@@ -10694,7 +10694,7 @@
           <a:bodyPr wrap="square" lIns="0" tIns="0" rIns="0" bIns="0" rtlCol="0" anchor="ctr"/>
           <a:lstStyle/>
           <a:p>
-            <a:pPr indent="0" marL="0">
+            <a:pPr eaLnBrk="0" indent="0" marL="0">
               <a:spcAft>
                 <a:spcPts val="600"/>
               </a:spcAft>
@@ -10749,7 +10749,7 @@
                     <a:bodyPr/>
                     <a:lstStyle/>
                     <a:p>
-                      <a:pPr algn="ctr" indent="0" marL="0">
+                      <a:pPr eaLnBrk="0" algn="ctr" indent="0" marL="0">
                         <a:buNone/>
                       </a:pPr>
                       <a:r>
@@ -10817,7 +10817,7 @@
                     <a:bodyPr/>
                     <a:lstStyle/>
                     <a:p>
-                      <a:pPr algn="ctr" indent="0" marL="0">
+                      <a:pPr eaLnBrk="0" algn="ctr" indent="0" marL="0">
                         <a:buNone/>
                       </a:pPr>
                       <a:r>
@@ -10885,7 +10885,7 @@
                     <a:bodyPr/>
                     <a:lstStyle/>
                     <a:p>
-                      <a:pPr algn="ctr" indent="0" marL="0">
+                      <a:pPr eaLnBrk="0" algn="ctr" indent="0" marL="0">
                         <a:buNone/>
                       </a:pPr>
                       <a:r>
@@ -10953,7 +10953,7 @@
                     <a:bodyPr/>
                     <a:lstStyle/>
                     <a:p>
-                      <a:pPr algn="ctr" indent="0" marL="0">
+                      <a:pPr eaLnBrk="0" algn="ctr" indent="0" marL="0">
                         <a:buNone/>
                       </a:pPr>
                       <a:r>
@@ -11023,7 +11023,7 @@
                     <a:bodyPr/>
                     <a:lstStyle/>
                     <a:p>
-                      <a:pPr algn="ctr" indent="0" marL="0">
+                      <a:pPr eaLnBrk="0" algn="ctr" indent="0" marL="0">
                         <a:buNone/>
                       </a:pPr>
                       <a:r>
@@ -11091,7 +11091,7 @@
                     <a:bodyPr/>
                     <a:lstStyle/>
                     <a:p>
-                      <a:pPr algn="ctr" indent="0" marL="0">
+                      <a:pPr eaLnBrk="0" algn="ctr" indent="0" marL="0">
                         <a:buNone/>
                       </a:pPr>
                       <a:r>
@@ -11159,7 +11159,7 @@
                     <a:bodyPr/>
                     <a:lstStyle/>
                     <a:p>
-                      <a:pPr algn="ctr" indent="0" marL="0">
+                      <a:pPr eaLnBrk="0" algn="ctr" indent="0" marL="0">
                         <a:buNone/>
                       </a:pPr>
                       <a:r>
@@ -11227,7 +11227,7 @@
                     <a:bodyPr/>
                     <a:lstStyle/>
                     <a:p>
-                      <a:pPr algn="ctr" indent="0" marL="0">
+                      <a:pPr eaLnBrk="0" algn="ctr" indent="0" marL="0">
                         <a:buNone/>
                       </a:pPr>
                       <a:r>
@@ -11297,7 +11297,7 @@
                     <a:bodyPr/>
                     <a:lstStyle/>
                     <a:p>
-                      <a:pPr algn="ctr" indent="0" marL="0">
+                      <a:pPr eaLnBrk="0" algn="ctr" indent="0" marL="0">
                         <a:buNone/>
                       </a:pPr>
                       <a:r>
@@ -11365,7 +11365,7 @@
                     <a:bodyPr/>
                     <a:lstStyle/>
                     <a:p>
-                      <a:pPr algn="ctr" indent="0" marL="0">
+                      <a:pPr eaLnBrk="0" algn="ctr" indent="0" marL="0">
                         <a:buNone/>
                       </a:pPr>
                       <a:r>
@@ -11433,7 +11433,7 @@
                     <a:bodyPr/>
                     <a:lstStyle/>
                     <a:p>
-                      <a:pPr algn="ctr" indent="0" marL="0">
+                      <a:pPr eaLnBrk="0" algn="ctr" indent="0" marL="0">
                         <a:buNone/>
                       </a:pPr>
                       <a:r>
@@ -11501,7 +11501,7 @@
                     <a:bodyPr/>
                     <a:lstStyle/>
                     <a:p>
-                      <a:pPr algn="ctr" indent="0" marL="0">
+                      <a:pPr eaLnBrk="0" algn="ctr" indent="0" marL="0">
                         <a:buNone/>
                       </a:pPr>
                       <a:r>
@@ -11571,7 +11571,7 @@
                     <a:bodyPr/>
                     <a:lstStyle/>
                     <a:p>
-                      <a:pPr algn="ctr" indent="0" marL="0">
+                      <a:pPr eaLnBrk="0" algn="ctr" indent="0" marL="0">
                         <a:buNone/>
                       </a:pPr>
                       <a:r>
@@ -11639,7 +11639,7 @@
                     <a:bodyPr/>
                     <a:lstStyle/>
                     <a:p>
-                      <a:pPr algn="ctr" indent="0" marL="0">
+                      <a:pPr eaLnBrk="0" algn="ctr" indent="0" marL="0">
                         <a:buNone/>
                       </a:pPr>
                       <a:r>
@@ -11707,7 +11707,7 @@
                     <a:bodyPr/>
                     <a:lstStyle/>
                     <a:p>
-                      <a:pPr algn="ctr" indent="0" marL="0">
+                      <a:pPr eaLnBrk="0" algn="ctr" indent="0" marL="0">
                         <a:buNone/>
                       </a:pPr>
                       <a:r>
@@ -11775,7 +11775,7 @@
                     <a:bodyPr/>
                     <a:lstStyle/>
                     <a:p>
-                      <a:pPr algn="ctr" indent="0" marL="0">
+                      <a:pPr eaLnBrk="0" algn="ctr" indent="0" marL="0">
                         <a:buNone/>
                       </a:pPr>
                       <a:r>
@@ -11845,7 +11845,7 @@
                     <a:bodyPr/>
                     <a:lstStyle/>
                     <a:p>
-                      <a:pPr algn="ctr" indent="0" marL="0">
+                      <a:pPr eaLnBrk="0" algn="ctr" indent="0" marL="0">
                         <a:buNone/>
                       </a:pPr>
                       <a:r>
@@ -11913,7 +11913,7 @@
                     <a:bodyPr/>
                     <a:lstStyle/>
                     <a:p>
-                      <a:pPr algn="ctr" indent="0" marL="0">
+                      <a:pPr eaLnBrk="0" algn="ctr" indent="0" marL="0">
                         <a:buNone/>
                       </a:pPr>
                       <a:r>
@@ -11981,7 +11981,7 @@
                     <a:bodyPr/>
                     <a:lstStyle/>
                     <a:p>
-                      <a:pPr algn="ctr" indent="0" marL="0">
+                      <a:pPr eaLnBrk="0" algn="ctr" indent="0" marL="0">
                         <a:buNone/>
                       </a:pPr>
                       <a:r>
@@ -12049,7 +12049,7 @@
                     <a:bodyPr/>
                     <a:lstStyle/>
                     <a:p>
-                      <a:pPr algn="ctr" indent="0" marL="0">
+                      <a:pPr eaLnBrk="0" algn="ctr" indent="0" marL="0">
                         <a:buNone/>
                       </a:pPr>
                       <a:r>
@@ -12156,7 +12156,7 @@
             </a:lvl1pPr>
           </a:lstStyle>
           <a:p>
-            <a:pPr algn="r"/>
+            <a:pPr eaLnBrk="0" algn="r"/>
             <a:fld id="{F7021451-1387-4CA6-816F-3879F97B5CBC}" type="slidenum">
               <a:rPr b="0" lang="en-US"/>
               <a:t>3</a:t>
@@ -12213,7 +12213,7 @@
           <a:bodyPr wrap="square" lIns="0" tIns="0" rIns="0" bIns="0" rtlCol="0" anchor="ctr"/>
           <a:lstStyle/>
           <a:p>
-            <a:pPr algn="l" indent="0" marL="0">
+            <a:pPr eaLnBrk="0" algn="l" indent="0" marL="0">
               <a:buNone/>
             </a:pPr>
             <a:r>
@@ -12279,7 +12279,7 @@
           <a:bodyPr wrap="square" lIns="0" tIns="0" rIns="0" bIns="0" rtlCol="0" anchor="ctr"/>
           <a:lstStyle/>
           <a:p>
-            <a:pPr indent="0" marL="0">
+            <a:pPr eaLnBrk="0" indent="0" marL="0">
               <a:spcAft>
                 <a:spcPts val="600"/>
               </a:spcAft>
@@ -12299,7 +12299,7 @@
             <a:endParaRPr lang="ko-KR" sz="3200" dirty="0"/>
           </a:p>
           <a:p>
-            <a:pPr indent="0" marL="0">
+            <a:pPr eaLnBrk="0" indent="0" marL="0">
               <a:spcAft>
                 <a:spcPts val="600"/>
               </a:spcAft>
@@ -14130,7 +14130,7 @@
                     <a:bodyPr/>
                     <a:lstStyle/>
                     <a:p>
-                      <a:pPr algn="ctr" indent="0" marL="0">
+                      <a:pPr eaLnBrk="0" algn="ctr" indent="0" marL="0">
                         <a:buNone/>
                       </a:pPr>
                       <a:r>
@@ -14198,7 +14198,7 @@
                     <a:bodyPr/>
                     <a:lstStyle/>
                     <a:p>
-                      <a:pPr algn="ctr" indent="0" marL="0">
+                      <a:pPr eaLnBrk="0" algn="ctr" indent="0" marL="0">
                         <a:buNone/>
                       </a:pPr>
                       <a:r>
@@ -14268,7 +14268,7 @@
                     <a:bodyPr/>
                     <a:lstStyle/>
                     <a:p>
-                      <a:pPr algn="ctr" indent="0" marL="0">
+                      <a:pPr eaLnBrk="0" algn="ctr" indent="0" marL="0">
                         <a:buNone/>
                       </a:pPr>
                       <a:r>
@@ -14336,7 +14336,7 @@
                     <a:bodyPr/>
                     <a:lstStyle/>
                     <a:p>
-                      <a:pPr algn="ctr" indent="0" marL="0">
+                      <a:pPr eaLnBrk="0" algn="ctr" indent="0" marL="0">
                         <a:buNone/>
                       </a:pPr>
                       <a:r>
@@ -14443,7 +14443,7 @@
             </a:lvl1pPr>
           </a:lstStyle>
           <a:p>
-            <a:pPr algn="r"/>
+            <a:pPr eaLnBrk="0" algn="r"/>
             <a:fld id="{F7021451-1387-4CA6-816F-3879F97B5CBC}" type="slidenum">
               <a:rPr b="0" lang="en-US"/>
               <a:t>4</a:t>
@@ -14500,7 +14500,7 @@
           <a:bodyPr wrap="square" lIns="0" tIns="0" rIns="0" bIns="0" rtlCol="0" anchor="ctr"/>
           <a:lstStyle/>
           <a:p>
-            <a:pPr algn="l" indent="0" marL="0">
+            <a:pPr eaLnBrk="0" algn="l" indent="0" marL="0">
               <a:buNone/>
             </a:pPr>
             <a:r>
@@ -14566,7 +14566,7 @@
           <a:bodyPr wrap="square" lIns="0" tIns="0" rIns="0" bIns="0" rtlCol="0" anchor="ctr"/>
           <a:lstStyle/>
           <a:p>
-            <a:pPr indent="0" marL="0">
+            <a:pPr eaLnBrk="0" indent="0" marL="0">
               <a:spcAft>
                 <a:spcPts val="600"/>
               </a:spcAft>
@@ -14586,7 +14586,7 @@
             <a:endParaRPr lang="ko-KR" sz="3200" dirty="0"/>
           </a:p>
           <a:p>
-            <a:pPr indent="0" marL="0">
+            <a:pPr eaLnBrk="0" indent="0" marL="0">
               <a:spcAft>
                 <a:spcPts val="600"/>
               </a:spcAft>
@@ -14655,7 +14655,7 @@
           <a:bodyPr wrap="square" lIns="0" tIns="0" rIns="0" bIns="0" rtlCol="0" anchor="ctr"/>
           <a:lstStyle/>
           <a:p>
-            <a:pPr indent="0" marL="0">
+            <a:pPr eaLnBrk="0" indent="0" marL="0">
               <a:spcAft>
                 <a:spcPts val="600"/>
               </a:spcAft>
@@ -14724,7 +14724,7 @@
           <a:bodyPr wrap="square" lIns="0" tIns="0" rIns="0" bIns="0" rtlCol="0" anchor="ctr"/>
           <a:lstStyle/>
           <a:p>
-            <a:pPr indent="0" marL="0">
+            <a:pPr eaLnBrk="0" indent="0" marL="0">
               <a:spcAft>
                 <a:spcPts val="600"/>
               </a:spcAft>
@@ -17133,7 +17133,7 @@
             </a:lvl1pPr>
           </a:lstStyle>
           <a:p>
-            <a:pPr algn="r"/>
+            <a:pPr eaLnBrk="0" algn="r"/>
             <a:fld id="{F7021451-1387-4CA6-816F-3879F97B5CBC}" type="slidenum">
               <a:rPr b="0" lang="en-US"/>
               <a:t>5</a:t>
@@ -17190,7 +17190,7 @@
           <a:bodyPr wrap="square" lIns="0" tIns="0" rIns="0" bIns="0" rtlCol="0" anchor="ctr"/>
           <a:lstStyle/>
           <a:p>
-            <a:pPr algn="l" indent="0" marL="0">
+            <a:pPr eaLnBrk="0" algn="l" indent="0" marL="0">
               <a:buNone/>
             </a:pPr>
             <a:r>
@@ -17256,7 +17256,7 @@
           <a:bodyPr wrap="square" lIns="0" tIns="0" rIns="0" bIns="0" rtlCol="0" anchor="ctr"/>
           <a:lstStyle/>
           <a:p>
-            <a:pPr indent="0" marL="0">
+            <a:pPr eaLnBrk="0" indent="0" marL="0">
               <a:spcAft>
                 <a:spcPts val="600"/>
               </a:spcAft>
@@ -18819,7 +18819,7 @@
           <a:bodyPr wrap="square" lIns="0" tIns="0" rIns="0" bIns="0" rtlCol="0" anchor="ctr"/>
           <a:lstStyle/>
           <a:p>
-            <a:pPr algn="ctr" indent="0" marL="0">
+            <a:pPr eaLnBrk="0" algn="ctr" indent="0" marL="0">
               <a:buNone/>
             </a:pPr>
             <a:r>
@@ -20247,7 +20247,7 @@
           <a:bodyPr wrap="square" lIns="0" tIns="0" rIns="0" bIns="0" rtlCol="0" anchor="ctr"/>
           <a:lstStyle/>
           <a:p>
-            <a:pPr algn="ctr" indent="0" marL="0">
+            <a:pPr eaLnBrk="0" algn="ctr" indent="0" marL="0">
               <a:buNone/>
             </a:pPr>
             <a:r>
@@ -20304,7 +20304,7 @@
             </a:lvl1pPr>
           </a:lstStyle>
           <a:p>
-            <a:pPr algn="r"/>
+            <a:pPr eaLnBrk="0" algn="r"/>
             <a:fld id="{F7021451-1387-4CA6-816F-3879F97B5CBC}" type="slidenum">
               <a:rPr b="0" lang="en-US"/>
               <a:t>6</a:t>
@@ -20361,7 +20361,7 @@
           <a:bodyPr wrap="square" lIns="0" tIns="0" rIns="0" bIns="0" rtlCol="0" anchor="ctr"/>
           <a:lstStyle/>
           <a:p>
-            <a:pPr algn="l" indent="0" marL="0">
+            <a:pPr eaLnBrk="0" algn="l" indent="0" marL="0">
               <a:buNone/>
             </a:pPr>
             <a:r>
@@ -20427,7 +20427,7 @@
           <a:bodyPr wrap="square" lIns="0" tIns="0" rIns="0" bIns="0" rtlCol="0" anchor="ctr"/>
           <a:lstStyle/>
           <a:p>
-            <a:pPr indent="0" marL="0">
+            <a:pPr eaLnBrk="0" indent="0" marL="0">
               <a:spcAft>
                 <a:spcPts val="600"/>
               </a:spcAft>
@@ -22197,7 +22197,7 @@
           <a:bodyPr wrap="square" lIns="0" tIns="0" rIns="0" bIns="0" rtlCol="0" anchor="ctr"/>
           <a:lstStyle/>
           <a:p>
-            <a:pPr algn="ctr" indent="0" marL="0">
+            <a:pPr eaLnBrk="0" algn="ctr" indent="0" marL="0">
               <a:buNone/>
             </a:pPr>
             <a:r>
@@ -24039,7 +24039,7 @@
           <a:bodyPr wrap="square" lIns="0" tIns="0" rIns="0" bIns="0" rtlCol="0" anchor="ctr"/>
           <a:lstStyle/>
           <a:p>
-            <a:pPr algn="ctr" indent="0" marL="0">
+            <a:pPr eaLnBrk="0" algn="ctr" indent="0" marL="0">
               <a:buNone/>
             </a:pPr>
             <a:r>
@@ -24096,7 +24096,7 @@
             </a:lvl1pPr>
           </a:lstStyle>
           <a:p>
-            <a:pPr algn="r"/>
+            <a:pPr eaLnBrk="0" algn="r"/>
             <a:fld id="{F7021451-1387-4CA6-816F-3879F97B5CBC}" type="slidenum">
               <a:rPr b="0" lang="en-US"/>
               <a:t>7</a:t>
@@ -24153,7 +24153,7 @@
           <a:bodyPr wrap="square" lIns="0" tIns="0" rIns="0" bIns="0" rtlCol="0" anchor="ctr"/>
           <a:lstStyle/>
           <a:p>
-            <a:pPr algn="l" indent="0" marL="0">
+            <a:pPr eaLnBrk="0" algn="l" indent="0" marL="0">
               <a:buNone/>
             </a:pPr>
             <a:r>
@@ -24219,7 +24219,7 @@
           <a:bodyPr wrap="square" lIns="0" tIns="0" rIns="0" bIns="0" rtlCol="0" anchor="ctr"/>
           <a:lstStyle/>
           <a:p>
-            <a:pPr indent="0" marL="0">
+            <a:pPr eaLnBrk="0" indent="0" marL="0">
               <a:spcAft>
                 <a:spcPts val="600"/>
               </a:spcAft>
@@ -24269,7 +24269,7 @@
           <a:bodyPr wrap="square" lIns="0" tIns="0" rIns="0" bIns="0" rtlCol="0" anchor="ctr"/>
           <a:lstStyle/>
           <a:p>
-            <a:pPr algn="ctr" indent="0" marL="0">
+            <a:pPr eaLnBrk="0" algn="ctr" indent="0" marL="0">
               <a:buNone/>
             </a:pPr>
             <a:r>
@@ -24308,7 +24308,7 @@
           <a:bodyPr wrap="square" lIns="0" tIns="0" rIns="0" bIns="0" rtlCol="0" anchor="ctr"/>
           <a:lstStyle/>
           <a:p>
-            <a:pPr algn="l" indent="0" marL="0">
+            <a:pPr eaLnBrk="0" algn="l" indent="0" marL="0">
               <a:buNone/>
             </a:pPr>
             <a:r>
@@ -24355,7 +24355,7 @@
           <a:bodyPr wrap="square" lIns="0" tIns="0" rIns="0" bIns="0" rtlCol="0" anchor="ctr"/>
           <a:lstStyle/>
           <a:p>
-            <a:pPr algn="ctr" indent="0" marL="0">
+            <a:pPr eaLnBrk="0" algn="ctr" indent="0" marL="0">
               <a:buNone/>
             </a:pPr>
             <a:r>
@@ -24394,7 +24394,7 @@
           <a:bodyPr wrap="square" lIns="0" tIns="0" rIns="0" bIns="0" rtlCol="0" anchor="ctr"/>
           <a:lstStyle/>
           <a:p>
-            <a:pPr algn="l" indent="0" marL="0">
+            <a:pPr eaLnBrk="0" algn="l" indent="0" marL="0">
               <a:buNone/>
             </a:pPr>
             <a:r>
@@ -24441,7 +24441,7 @@
           <a:bodyPr wrap="square" lIns="0" tIns="0" rIns="0" bIns="0" rtlCol="0" anchor="ctr"/>
           <a:lstStyle/>
           <a:p>
-            <a:pPr algn="ctr" indent="0" marL="0">
+            <a:pPr eaLnBrk="0" algn="ctr" indent="0" marL="0">
               <a:buNone/>
             </a:pPr>
             <a:r>
@@ -24480,7 +24480,7 @@
           <a:bodyPr wrap="square" lIns="0" tIns="0" rIns="0" bIns="0" rtlCol="0" anchor="ctr"/>
           <a:lstStyle/>
           <a:p>
-            <a:pPr algn="l" indent="0" marL="0">
+            <a:pPr eaLnBrk="0" algn="l" indent="0" marL="0">
               <a:buNone/>
             </a:pPr>
             <a:r>
@@ -24527,7 +24527,7 @@
           <a:bodyPr wrap="square" lIns="0" tIns="0" rIns="0" bIns="0" rtlCol="0" anchor="ctr"/>
           <a:lstStyle/>
           <a:p>
-            <a:pPr algn="ctr" indent="0" marL="0">
+            <a:pPr eaLnBrk="0" algn="ctr" indent="0" marL="0">
               <a:buNone/>
             </a:pPr>
             <a:r>
@@ -24566,7 +24566,7 @@
           <a:bodyPr wrap="square" lIns="0" tIns="0" rIns="0" bIns="0" rtlCol="0" anchor="ctr"/>
           <a:lstStyle/>
           <a:p>
-            <a:pPr algn="l" indent="0" marL="0">
+            <a:pPr eaLnBrk="0" algn="l" indent="0" marL="0">
               <a:buNone/>
             </a:pPr>
             <a:r>
@@ -24623,7 +24623,7 @@
             </a:lvl1pPr>
           </a:lstStyle>
           <a:p>
-            <a:pPr algn="r"/>
+            <a:pPr eaLnBrk="0" algn="r"/>
             <a:fld id="{F7021451-1387-4CA6-816F-3879F97B5CBC}" type="slidenum">
               <a:rPr b="0" lang="en-US"/>
               <a:t>8</a:t>
@@ -24680,7 +24680,7 @@
           <a:bodyPr wrap="square" lIns="0" tIns="0" rIns="0" bIns="0" rtlCol="0" anchor="ctr"/>
           <a:lstStyle/>
           <a:p>
-            <a:pPr algn="l" indent="0" marL="0">
+            <a:pPr eaLnBrk="0" algn="l" indent="0" marL="0">
               <a:buNone/>
             </a:pPr>
             <a:r>
@@ -24719,7 +24719,7 @@
           <a:bodyPr wrap="square" lIns="0" tIns="0" rIns="0" bIns="0" rtlCol="0" anchor="ctr"/>
           <a:lstStyle/>
           <a:p>
-            <a:pPr algn="l" indent="0" marL="0">
+            <a:pPr eaLnBrk="0" algn="l" indent="0" marL="0">
               <a:buNone/>
             </a:pPr>
             <a:r>
@@ -24785,7 +24785,7 @@
           <a:bodyPr wrap="square" lIns="0" tIns="0" rIns="0" bIns="0" rtlCol="0" anchor="ctr"/>
           <a:lstStyle/>
           <a:p>
-            <a:pPr indent="0" marL="0">
+            <a:pPr eaLnBrk="0" indent="0" marL="0">
               <a:spcAft>
                 <a:spcPts val="600"/>
               </a:spcAft>
@@ -24854,7 +24854,7 @@
           <a:bodyPr wrap="square" lIns="0" tIns="0" rIns="0" bIns="0" rtlCol="0" anchor="t"/>
           <a:lstStyle/>
           <a:p>
-            <a:pPr indent="0" marL="0">
+            <a:pPr eaLnBrk="0" indent="0" marL="0">
               <a:spcAft>
                 <a:spcPts val="600"/>
               </a:spcAft>
@@ -24908,7 +24908,7 @@
                     <a:bodyPr/>
                     <a:lstStyle/>
                     <a:p>
-                      <a:pPr algn="ctr" indent="0" marL="0">
+                      <a:pPr eaLnBrk="0" algn="ctr" indent="0" marL="0">
                         <a:buNone/>
                       </a:pPr>
                       <a:endParaRPr lang="en-US" sz="3000" dirty="0">
@@ -24965,7 +24965,7 @@
                     <a:bodyPr/>
                     <a:lstStyle/>
                     <a:p>
-                      <a:pPr algn="ctr" indent="0" marL="0">
+                      <a:pPr eaLnBrk="0" algn="ctr" indent="0" marL="0">
                         <a:buNone/>
                       </a:pPr>
                       <a:r>
@@ -25033,7 +25033,7 @@
                     <a:bodyPr/>
                     <a:lstStyle/>
                     <a:p>
-                      <a:pPr algn="ctr" indent="0" marL="0">
+                      <a:pPr eaLnBrk="0" algn="ctr" indent="0" marL="0">
                         <a:buNone/>
                       </a:pPr>
                       <a:r>
@@ -25103,7 +25103,7 @@
                     <a:bodyPr/>
                     <a:lstStyle/>
                     <a:p>
-                      <a:pPr algn="ctr" indent="0" marL="0">
+                      <a:pPr eaLnBrk="0" algn="ctr" indent="0" marL="0">
                         <a:buNone/>
                       </a:pPr>
                       <a:r>
@@ -25171,7 +25171,7 @@
                     <a:bodyPr/>
                     <a:lstStyle/>
                     <a:p>
-                      <a:pPr algn="ctr" indent="0" marL="0">
+                      <a:pPr eaLnBrk="0" algn="ctr" indent="0" marL="0">
                         <a:buNone/>
                       </a:pPr>
                       <a:r>
@@ -25239,7 +25239,7 @@
                     <a:bodyPr/>
                     <a:lstStyle/>
                     <a:p>
-                      <a:pPr algn="ctr" indent="0" marL="0">
+                      <a:pPr eaLnBrk="0" algn="ctr" indent="0" marL="0">
                         <a:buNone/>
                       </a:pPr>
                       <a:r>
@@ -25309,7 +25309,7 @@
                     <a:bodyPr/>
                     <a:lstStyle/>
                     <a:p>
-                      <a:pPr algn="ctr" indent="0" marL="0">
+                      <a:pPr eaLnBrk="0" algn="ctr" indent="0" marL="0">
                         <a:buNone/>
                       </a:pPr>
                       <a:r>
@@ -25377,7 +25377,7 @@
                     <a:bodyPr/>
                     <a:lstStyle/>
                     <a:p>
-                      <a:pPr algn="ctr" indent="0" marL="0">
+                      <a:pPr eaLnBrk="0" algn="ctr" indent="0" marL="0">
                         <a:buNone/>
                       </a:pPr>
                       <a:r>
@@ -25445,7 +25445,7 @@
                     <a:bodyPr/>
                     <a:lstStyle/>
                     <a:p>
-                      <a:pPr algn="ctr" indent="0" marL="0">
+                      <a:pPr eaLnBrk="0" algn="ctr" indent="0" marL="0">
                         <a:buNone/>
                       </a:pPr>
                       <a:r>
@@ -25542,7 +25542,7 @@
           <a:bodyPr wrap="square" lIns="0" tIns="0" rIns="0" bIns="0" rtlCol="0" anchor="ctr"/>
           <a:lstStyle/>
           <a:p>
-            <a:pPr algn="ctr" indent="0" marL="0">
+            <a:pPr eaLnBrk="0" algn="ctr" indent="0" marL="0">
               <a:buNone/>
             </a:pPr>
             <a:r>
@@ -25581,7 +25581,7 @@
           <a:bodyPr wrap="square" lIns="0" tIns="0" rIns="0" bIns="0" rtlCol="0" anchor="ctr"/>
           <a:lstStyle/>
           <a:p>
-            <a:pPr algn="l" indent="0" marL="0">
+            <a:pPr eaLnBrk="0" algn="l" indent="0" marL="0">
               <a:buNone/>
             </a:pPr>
             <a:r>
@@ -25628,7 +25628,7 @@
           <a:bodyPr wrap="square" lIns="0" tIns="0" rIns="0" bIns="0" rtlCol="0" anchor="ctr"/>
           <a:lstStyle/>
           <a:p>
-            <a:pPr algn="ctr" indent="0" marL="0">
+            <a:pPr eaLnBrk="0" algn="ctr" indent="0" marL="0">
               <a:buNone/>
             </a:pPr>
             <a:r>
@@ -25667,7 +25667,7 @@
           <a:bodyPr wrap="square" lIns="0" tIns="0" rIns="0" bIns="0" rtlCol="0" anchor="ctr"/>
           <a:lstStyle/>
           <a:p>
-            <a:pPr algn="l" indent="0" marL="0">
+            <a:pPr eaLnBrk="0" algn="l" indent="0" marL="0">
               <a:buNone/>
             </a:pPr>
             <a:r>
@@ -25714,7 +25714,7 @@
           <a:bodyPr wrap="square" lIns="0" tIns="0" rIns="0" bIns="0" rtlCol="0" anchor="ctr"/>
           <a:lstStyle/>
           <a:p>
-            <a:pPr algn="ctr" indent="0" marL="0">
+            <a:pPr eaLnBrk="0" algn="ctr" indent="0" marL="0">
               <a:buNone/>
             </a:pPr>
             <a:r>
@@ -25753,7 +25753,7 @@
           <a:bodyPr wrap="square" lIns="0" tIns="0" rIns="0" bIns="0" rtlCol="0" anchor="ctr"/>
           <a:lstStyle/>
           <a:p>
-            <a:pPr algn="l" indent="0" marL="0">
+            <a:pPr eaLnBrk="0" algn="l" indent="0" marL="0">
               <a:buNone/>
             </a:pPr>
             <a:r>
@@ -25810,7 +25810,7 @@
             </a:lvl1pPr>
           </a:lstStyle>
           <a:p>
-            <a:pPr algn="r"/>
+            <a:pPr eaLnBrk="0" algn="r"/>
             <a:fld id="{F7021451-1387-4CA6-816F-3879F97B5CBC}" type="slidenum">
               <a:rPr b="0" lang="en-US"/>
               <a:t>9</a:t>

--- a/dist/초1/수학/수와연산/초1_수학_수와연산_07_100까지의수.pptx
+++ b/dist/초1/수학/수와연산/초1_수학_수와연산_07_100까지의수.pptx
@@ -121,13 +121,13 @@
   <p:extLst>
     <p:ext uri="{521415D9-36F7-43E2-AB2F-B90AF26B5E84}">
       <p14:sectionLst xmlns:p14="http://schemas.microsoft.com/office/powerpoint/2010/main">
-        <p14:section name="도입" id="{3d3ab864-a7ab-5bb4-c4e5-bd21a18e0aa9}">
+        <p14:section name="도입" id="{fc33aaac-945a-4898-1e1d-7c0c4ccd2568}">
           <p14:sldIdLst>
             <p14:sldId id="256"/>
             <p14:sldId id="257"/>
           </p14:sldIdLst>
         </p14:section>
-        <p14:section name="개념" id="{1efc6dfb-75f6-29e3-a36f-0511e540bc74}">
+        <p14:section name="개념" id="{95466fc1-bbed-a854-4d41-f075b45eb4c9}">
           <p14:sldIdLst>
             <p14:sldId id="258"/>
             <p14:sldId id="259"/>
@@ -136,26 +136,26 @@
             <p14:sldId id="262"/>
           </p14:sldIdLst>
         </p14:section>
-        <p14:section name="연습" id="{dbec8505-b449-832d-9a1b-3ebef109ef6e}">
+        <p14:section name="연습" id="{c075ff0d-8c7e-bd83-4ab2-71c92c532311}">
           <p14:sldIdLst>
             <p14:sldId id="263"/>
             <p14:sldId id="264"/>
             <p14:sldId id="265"/>
           </p14:sldIdLst>
         </p14:section>
-        <p14:section name="확인" id="{ce20caa1-33dc-526d-54cc-a497b2247782}">
+        <p14:section name="확인" id="{86bf8cd9-5f06-cb36-7078-0cae4b5810a3}">
           <p14:sldIdLst>
             <p14:sldId id="266"/>
             <p14:sldId id="267"/>
             <p14:sldId id="268"/>
           </p14:sldIdLst>
         </p14:section>
-        <p14:section name="정리" id="{187e17e8-a5c7-c146-1b17-8c7bbf725493}">
+        <p14:section name="정리" id="{67d7ca7a-8579-24ff-a2eb-12f1806b0b14}">
           <p14:sldIdLst>
             <p14:sldId id="269"/>
           </p14:sldIdLst>
         </p14:section>
-        <p14:section name="보충" id="{6f1b2c63-9f31-8f35-c98a-f836ae6819d7}">
+        <p14:section name="보충" id="{6f3c04a5-591a-6b1e-d837-9f942d3bc6e6}">
           <p14:sldIdLst>
             <p14:sldId id="270"/>
           </p14:sldIdLst>

--- a/dist/초1/수학/수와연산/초1_수학_수와연산_07_100까지의수.pptx
+++ b/dist/초1/수학/수와연산/초1_수학_수와연산_07_100까지의수.pptx
@@ -121,13 +121,13 @@
   <p:extLst>
     <p:ext uri="{521415D9-36F7-43E2-AB2F-B90AF26B5E84}">
       <p14:sectionLst xmlns:p14="http://schemas.microsoft.com/office/powerpoint/2010/main">
-        <p14:section name="도입" id="{fc33aaac-945a-4898-1e1d-7c0c4ccd2568}">
+        <p14:section name="도입" id="{16301213-95f8-71d0-c07b-3a8a83a4e653}">
           <p14:sldIdLst>
             <p14:sldId id="256"/>
             <p14:sldId id="257"/>
           </p14:sldIdLst>
         </p14:section>
-        <p14:section name="개념" id="{95466fc1-bbed-a854-4d41-f075b45eb4c9}">
+        <p14:section name="개념" id="{892a1eaa-03ca-76bf-dfba-51e5d7ae4630}">
           <p14:sldIdLst>
             <p14:sldId id="258"/>
             <p14:sldId id="259"/>
@@ -136,26 +136,26 @@
             <p14:sldId id="262"/>
           </p14:sldIdLst>
         </p14:section>
-        <p14:section name="연습" id="{c075ff0d-8c7e-bd83-4ab2-71c92c532311}">
+        <p14:section name="연습" id="{5279aa58-dc03-f62a-ff1a-6547c38985b5}">
           <p14:sldIdLst>
             <p14:sldId id="263"/>
             <p14:sldId id="264"/>
             <p14:sldId id="265"/>
           </p14:sldIdLst>
         </p14:section>
-        <p14:section name="확인" id="{86bf8cd9-5f06-cb36-7078-0cae4b5810a3}">
+        <p14:section name="확인" id="{80331c4d-5370-c9c1-396b-1ab64f926976}">
           <p14:sldIdLst>
             <p14:sldId id="266"/>
             <p14:sldId id="267"/>
             <p14:sldId id="268"/>
           </p14:sldIdLst>
         </p14:section>
-        <p14:section name="정리" id="{67d7ca7a-8579-24ff-a2eb-12f1806b0b14}">
+        <p14:section name="정리" id="{7c747952-2108-6eed-75c2-e11391d300a4}">
           <p14:sldIdLst>
             <p14:sldId id="269"/>
           </p14:sldIdLst>
         </p14:section>
-        <p14:section name="보충" id="{6f3c04a5-591a-6b1e-d837-9f942d3bc6e6}">
+        <p14:section name="보충" id="{d995964d-3df4-43ce-81b8-2e2f190e47f4}">
           <p14:sldIdLst>
             <p14:sldId id="270"/>
           </p14:sldIdLst>
@@ -10730,7 +10730,7 @@
           </p:nvPr>
         </p:nvGraphicFramePr>
         <p:xfrm>
-          <a:off x="1522476" y="2042160"/>
+          <a:off x="1522476" y="2089785"/>
           <a:ext cx="9144000" cy="914400"/>
         </p:xfrm>
         <a:graphic>
@@ -10743,7 +10743,7 @@
                 <a:gridCol w="2103120"/>
                 <a:gridCol w="2103120"/>
               </a:tblGrid>
-              <a:tr h="609600">
+              <a:tr h="590550">
                 <a:tc>
                   <a:txBody>
                     <a:bodyPr/>
@@ -11017,7 +11017,7 @@
                   </a:tcPr>
                 </a:tc>
               </a:tr>
-              <a:tr h="609600">
+              <a:tr h="590550">
                 <a:tc>
                   <a:txBody>
                     <a:bodyPr/>
@@ -11291,7 +11291,7 @@
                   </a:tcPr>
                 </a:tc>
               </a:tr>
-              <a:tr h="609600">
+              <a:tr h="590550">
                 <a:tc>
                   <a:txBody>
                     <a:bodyPr/>
@@ -11565,7 +11565,7 @@
                   </a:tcPr>
                 </a:tc>
               </a:tr>
-              <a:tr h="609600">
+              <a:tr h="590550">
                 <a:tc>
                   <a:txBody>
                     <a:bodyPr/>
@@ -11839,7 +11839,7 @@
                   </a:tcPr>
                 </a:tc>
               </a:tr>
-              <a:tr h="609600">
+              <a:tr h="590550">
                 <a:tc>
                   <a:txBody>
                     <a:bodyPr/>
@@ -14113,7 +14113,7 @@
           </p:nvPr>
         </p:nvGraphicFramePr>
         <p:xfrm>
-          <a:off x="6478524" y="2355342"/>
+          <a:off x="6478524" y="2375662"/>
           <a:ext cx="4937760" cy="914400"/>
         </p:xfrm>
         <a:graphic>
@@ -14124,7 +14124,7 @@
                 <a:gridCol w="2962656"/>
                 <a:gridCol w="1975104"/>
               </a:tblGrid>
-              <a:tr h="650240">
+              <a:tr h="629920">
                 <a:tc>
                   <a:txBody>
                     <a:bodyPr/>
@@ -14262,7 +14262,7 @@
                   </a:tcPr>
                 </a:tc>
               </a:tr>
-              <a:tr h="650240">
+              <a:tr h="629920">
                 <a:tc>
                   <a:txBody>
                     <a:bodyPr/>
@@ -24890,7 +24890,7 @@
           </p:nvPr>
         </p:nvGraphicFramePr>
         <p:xfrm>
-          <a:off x="6551676" y="2903220"/>
+          <a:off x="6551676" y="2931795"/>
           <a:ext cx="4814316" cy="914400"/>
         </p:xfrm>
         <a:graphic>
@@ -24902,7 +24902,7 @@
                 <a:gridCol w="1604772"/>
                 <a:gridCol w="1604772"/>
               </a:tblGrid>
-              <a:tr h="609600">
+              <a:tr h="590550">
                 <a:tc>
                   <a:txBody>
                     <a:bodyPr/>
@@ -25097,7 +25097,7 @@
                   </a:tcPr>
                 </a:tc>
               </a:tr>
-              <a:tr h="609600">
+              <a:tr h="590550">
                 <a:tc>
                   <a:txBody>
                     <a:bodyPr/>
@@ -25303,7 +25303,7 @@
                   </a:tcPr>
                 </a:tc>
               </a:tr>
-              <a:tr h="609600">
+              <a:tr h="590550">
                 <a:tc>
                   <a:txBody>
                     <a:bodyPr/>
